--- a/templates/site_photo/site_photo_1_A.pptx
+++ b/templates/site_photo/site_photo_1_A.pptx
@@ -3098,7 +3098,51 @@
       <p:grpSpPr/>
       <p:sp>
         <p:nvSpPr>
-          <p:cNvPr id="2" name="TextBox 1"/>
+          <p:cNvPr id="2" name="Rectangle 1"/>
+          <p:cNvSpPr/>
+          <p:nvPr/>
+        </p:nvSpPr>
+        <p:spPr>
+          <a:xfrm>
+            <a:off x="0" y="0"/>
+            <a:ext cx="7560000" cy="10692000"/>
+          </a:xfrm>
+          <a:prstGeom prst="rect">
+            <a:avLst/>
+          </a:prstGeom>
+          <a:solidFill>
+            <a:srgbClr val="FFFFFF"/>
+          </a:solidFill>
+          <a:ln>
+            <a:noFill/>
+          </a:ln>
+          <a:effectLst/>
+        </p:spPr>
+        <p:style>
+          <a:lnRef idx="1">
+            <a:schemeClr val="accent1"/>
+          </a:lnRef>
+          <a:fillRef idx="3">
+            <a:schemeClr val="accent1"/>
+          </a:fillRef>
+          <a:effectRef idx="2">
+            <a:schemeClr val="accent1"/>
+          </a:effectRef>
+          <a:fontRef idx="minor">
+            <a:schemeClr val="lt1"/>
+          </a:fontRef>
+        </p:style>
+        <p:txBody>
+          <a:bodyPr rtlCol="0" anchor="ctr"/>
+          <a:lstStyle/>
+          <a:p>
+            <a:pPr algn="ctr"/>
+          </a:p>
+        </p:txBody>
+      </p:sp>
+      <p:sp>
+        <p:nvSpPr>
+          <p:cNvPr id="3" name="TextBox 2"/>
           <p:cNvSpPr txBox="1"/>
           <p:nvPr/>
         </p:nvSpPr>
@@ -3137,7 +3181,7 @@
       </p:sp>
       <p:sp>
         <p:nvSpPr>
-          <p:cNvPr id="3" name="Rectangle 2"/>
+          <p:cNvPr id="4" name="Rectangle 3"/>
           <p:cNvSpPr/>
           <p:nvPr/>
         </p:nvSpPr>
@@ -3181,7 +3225,7 @@
       </p:sp>
       <p:sp>
         <p:nvSpPr>
-          <p:cNvPr id="4" name="PHOTO_1"/>
+          <p:cNvPr id="5" name="PHOTO_1"/>
           <p:cNvSpPr/>
           <p:nvPr/>
         </p:nvSpPr>
@@ -3225,7 +3269,7 @@
       </p:sp>
       <p:sp>
         <p:nvSpPr>
-          <p:cNvPr id="5" name="Rectangle 4"/>
+          <p:cNvPr id="6" name="Rectangle 5"/>
           <p:cNvSpPr/>
           <p:nvPr/>
         </p:nvSpPr>
@@ -3269,7 +3313,7 @@
       </p:sp>
       <p:sp>
         <p:nvSpPr>
-          <p:cNvPr id="6" name="TextBox 5"/>
+          <p:cNvPr id="7" name="TextBox 6"/>
           <p:cNvSpPr txBox="1"/>
           <p:nvPr/>
         </p:nvSpPr>
